--- a/dist/초6/수학/입체와측정/초6_수학_입체와측정_02_원기둥·원뿔·구.pptx
+++ b/dist/초6/수학/입체와측정/초6_수학_입체와측정_02_원기둥·원뿔·구.pptx
@@ -122,13 +122,13 @@
   <p:extLst>
     <p:ext uri="{521415D9-36F7-43E2-AB2F-B90AF26B5E84}">
       <p14:sectionLst xmlns:p14="http://schemas.microsoft.com/office/powerpoint/2010/main">
-        <p14:section name="도입" id="{e9352ee2-8951-b96b-96b3-510f1e2e1027}">
+        <p14:section name="도입" id="{53be89d4-9655-358d-9285-9294a8662d00}">
           <p14:sldIdLst>
             <p14:sldId id="256"/>
             <p14:sldId id="257"/>
           </p14:sldIdLst>
         </p14:section>
-        <p14:section name="개념" id="{8b28d57b-725d-150a-71f2-4bfe22dd441d}">
+        <p14:section name="개념" id="{98331f65-f20d-a12b-c23e-67d534f237fc}">
           <p14:sldIdLst>
             <p14:sldId id="258"/>
             <p14:sldId id="259"/>
@@ -137,7 +137,7 @@
             <p14:sldId id="264"/>
           </p14:sldIdLst>
         </p14:section>
-        <p14:section name="연습" id="{fd72ff46-651f-3465-dc00-95417aeb0e6e}">
+        <p14:section name="연습" id="{ebe34fe9-a1ed-4c15-2dfb-b3511c62f104}">
           <p14:sldIdLst>
             <p14:sldId id="262"/>
             <p14:sldId id="263"/>
@@ -145,25 +145,25 @@
             <p14:sldId id="266"/>
           </p14:sldIdLst>
         </p14:section>
-        <p14:section name="개념" id="{b34af81d-6afc-7a06-2de6-7ebfb84da1a5}">
+        <p14:section name="개념" id="{e0576f48-97c4-0180-feb8-87d510ad4ab0}">
           <p14:sldIdLst/>
         </p14:section>
-        <p14:section name="연습" id="{84fd1fef-47ef-3c78-b697-27ce74affcdd}">
+        <p14:section name="연습" id="{5a18b3a9-56a6-0e44-af02-9e1b2da85505}">
           <p14:sldIdLst/>
         </p14:section>
-        <p14:section name="확인" id="{d69af9fb-3d06-649b-61f5-cf7c7759a0c1}">
+        <p14:section name="확인" id="{dcac5080-976d-5a36-20e1-9864a409cd86}">
           <p14:sldIdLst>
             <p14:sldId id="267"/>
             <p14:sldId id="268"/>
             <p14:sldId id="269"/>
           </p14:sldIdLst>
         </p14:section>
-        <p14:section name="정리" id="{314e6ccc-5329-d81d-1488-57f536ea389f}">
+        <p14:section name="정리" id="{7b86c2d7-86bd-a815-adf6-5aac0bc742fe}">
           <p14:sldIdLst>
             <p14:sldId id="270"/>
           </p14:sldIdLst>
         </p14:section>
-        <p14:section name="보충" id="{3ec8b358-1cf3-d34f-33e9-3f714af45b1a}">
+        <p14:section name="보충" id="{da85a2e0-f010-68f1-db06-4b52f179f726}">
           <p14:sldIdLst>
             <p14:sldId id="271"/>
           </p14:sldIdLst>
@@ -5285,8 +5285,8 @@
         </p:nvSpPr>
         <p:spPr>
           <a:xfrm>
-            <a:off x="7431044" y="2553789"/>
-            <a:ext cx="2804527" cy="1338943"/>
+            <a:off x="7535977" y="2599770"/>
+            <a:ext cx="2611904" cy="1246980"/>
           </a:xfrm>
           <a:custGeom>
             <a:avLst/>
@@ -5295,15 +5295,15 @@
             <a:cxnLst/>
             <a:rect l="l" t="t" r="r" b="b"/>
             <a:pathLst>
-              <a:path w="2804527" h="1338943">
+              <a:path w="2611904" h="1246980">
                 <a:moveTo>
-                  <a:pt x="0" y="1338943"/>
+                  <a:pt x="0" y="1246980"/>
                 </a:moveTo>
                 <a:lnTo>
-                  <a:pt x="2804527" y="1338943"/>
-                </a:lnTo>
-                <a:lnTo>
-                  <a:pt x="2804527" y="0"/>
+                  <a:pt x="2611904" y="1246980"/>
+                </a:lnTo>
+                <a:lnTo>
+                  <a:pt x="2611904" y="0"/>
                 </a:lnTo>
                 <a:lnTo>
                   <a:pt x="0" y="0"/>
@@ -5331,8 +5331,8 @@
         </p:nvSpPr>
         <p:spPr>
           <a:xfrm>
-            <a:off x="7570518" y="1661160"/>
-            <a:ext cx="892629" cy="892629"/>
+            <a:off x="7665871" y="1768450"/>
+            <a:ext cx="831320" cy="831320"/>
           </a:xfrm>
           <a:prstGeom prst="ellipse">
             <a:avLst/>
@@ -5356,8 +5356,8 @@
         </p:nvSpPr>
         <p:spPr>
           <a:xfrm>
-            <a:off x="7570518" y="3892731"/>
-            <a:ext cx="892629" cy="892629"/>
+            <a:off x="7665871" y="3846750"/>
+            <a:ext cx="831320" cy="831320"/>
           </a:xfrm>
           <a:prstGeom prst="ellipse">
             <a:avLst/>
@@ -5381,8 +5381,8 @@
         </p:nvSpPr>
         <p:spPr>
           <a:xfrm>
-            <a:off x="7431044" y="3062587"/>
-            <a:ext cx="2804527" cy="0"/>
+            <a:off x="7535977" y="3073622"/>
+            <a:ext cx="2611904" cy="0"/>
           </a:xfrm>
           <a:prstGeom prst="line">
             <a:avLst/>
@@ -5406,8 +5406,8 @@
         </p:nvSpPr>
         <p:spPr>
           <a:xfrm flipV="1">
-            <a:off x="10486624" y="2553789"/>
-            <a:ext cx="0" cy="1338943"/>
+            <a:off x="10381691" y="2599770"/>
+            <a:ext cx="0" cy="1246980"/>
           </a:xfrm>
           <a:prstGeom prst="line">
             <a:avLst/>
@@ -5431,7 +5431,7 @@
         </p:nvSpPr>
         <p:spPr>
           <a:xfrm>
-            <a:off x="8504632" y="2636502"/>
+            <a:off x="8513254" y="2647537"/>
             <a:ext cx="657352" cy="349250"/>
           </a:xfrm>
           <a:prstGeom prst="rect">
@@ -5470,7 +5470,7 @@
         </p:nvSpPr>
         <p:spPr>
           <a:xfrm>
-            <a:off x="10515580" y="3048635"/>
+            <a:off x="10410647" y="3048635"/>
             <a:ext cx="657352" cy="349250"/>
           </a:xfrm>
           <a:prstGeom prst="rect">
@@ -13051,7 +13051,7 @@
           </p:nvPr>
         </p:nvGraphicFramePr>
         <p:xfrm>
-          <a:off x="1065276" y="2042160"/>
+          <a:off x="1065276" y="2019300"/>
           <a:ext cx="10058400" cy="914400"/>
         </p:xfrm>
         <a:graphic>
@@ -13064,7 +13064,7 @@
                 <a:gridCol w="2313432"/>
                 <a:gridCol w="2313432"/>
               </a:tblGrid>
-              <a:tr h="472440">
+              <a:tr h="481584">
                 <a:tc>
                   <a:txBody>
                     <a:bodyPr/>
@@ -13327,7 +13327,7 @@
                   </a:tcPr>
                 </a:tc>
               </a:tr>
-              <a:tr h="472440">
+              <a:tr h="481584">
                 <a:tc>
                   <a:txBody>
                     <a:bodyPr/>
@@ -13601,7 +13601,7 @@
                   </a:tcPr>
                 </a:tc>
               </a:tr>
-              <a:tr h="472440">
+              <a:tr h="481584">
                 <a:tc>
                   <a:txBody>
                     <a:bodyPr/>
@@ -13875,7 +13875,7 @@
                   </a:tcPr>
                 </a:tc>
               </a:tr>
-              <a:tr h="472440">
+              <a:tr h="481584">
                 <a:tc>
                   <a:txBody>
                     <a:bodyPr/>
@@ -14149,7 +14149,7 @@
                   </a:tcPr>
                 </a:tc>
               </a:tr>
-              <a:tr h="472440">
+              <a:tr h="481584">
                 <a:tc>
                   <a:txBody>
                     <a:bodyPr/>
@@ -16068,8 +16068,8 @@
         </p:nvSpPr>
         <p:spPr>
           <a:xfrm>
-            <a:off x="1769255" y="3357154"/>
-            <a:ext cx="3173904" cy="1515291"/>
+            <a:off x="1874188" y="3403136"/>
+            <a:ext cx="2981281" cy="1423329"/>
           </a:xfrm>
           <a:custGeom>
             <a:avLst/>
@@ -16078,15 +16078,15 @@
             <a:cxnLst/>
             <a:rect l="l" t="t" r="r" b="b"/>
             <a:pathLst>
-              <a:path w="3173904" h="1515291">
+              <a:path w="2981281" h="1423329">
                 <a:moveTo>
-                  <a:pt x="0" y="1515291"/>
+                  <a:pt x="0" y="1423329"/>
                 </a:moveTo>
                 <a:lnTo>
-                  <a:pt x="3173904" y="1515291"/>
-                </a:lnTo>
-                <a:lnTo>
-                  <a:pt x="3173904" y="0"/>
+                  <a:pt x="2981281" y="1423329"/>
+                </a:lnTo>
+                <a:lnTo>
+                  <a:pt x="2981281" y="0"/>
                 </a:lnTo>
                 <a:lnTo>
                   <a:pt x="0" y="0"/>
@@ -16114,8 +16114,8 @@
         </p:nvSpPr>
         <p:spPr>
           <a:xfrm>
-            <a:off x="1927098" y="2346960"/>
-            <a:ext cx="1010194" cy="1010194"/>
+            <a:off x="2022452" y="2454250"/>
+            <a:ext cx="948886" cy="948886"/>
           </a:xfrm>
           <a:prstGeom prst="ellipse">
             <a:avLst/>
@@ -16139,8 +16139,8 @@
         </p:nvSpPr>
         <p:spPr>
           <a:xfrm>
-            <a:off x="1927098" y="4872446"/>
-            <a:ext cx="1010194" cy="1010194"/>
+            <a:off x="2022452" y="4826464"/>
+            <a:ext cx="948886" cy="948886"/>
           </a:xfrm>
           <a:prstGeom prst="ellipse">
             <a:avLst/>
@@ -16164,8 +16164,8 @@
         </p:nvSpPr>
         <p:spPr>
           <a:xfrm>
-            <a:off x="1769255" y="3932965"/>
-            <a:ext cx="3173904" cy="0"/>
+            <a:off x="1874188" y="3944001"/>
+            <a:ext cx="2981281" cy="0"/>
           </a:xfrm>
           <a:prstGeom prst="line">
             <a:avLst/>
@@ -16189,8 +16189,8 @@
         </p:nvSpPr>
         <p:spPr>
           <a:xfrm flipV="1">
-            <a:off x="5227276" y="3357154"/>
-            <a:ext cx="0" cy="1515291"/>
+            <a:off x="5122343" y="3403136"/>
+            <a:ext cx="0" cy="1423329"/>
           </a:xfrm>
           <a:prstGeom prst="line">
             <a:avLst/>
@@ -16214,7 +16214,7 @@
         </p:nvSpPr>
         <p:spPr>
           <a:xfrm>
-            <a:off x="5256232" y="3940175"/>
+            <a:off x="5151299" y="3940175"/>
             <a:ext cx="657352" cy="349250"/>
           </a:xfrm>
           <a:prstGeom prst="rect">
@@ -16253,7 +16253,7 @@
         </p:nvSpPr>
         <p:spPr>
           <a:xfrm>
-            <a:off x="2574588" y="3493164"/>
+            <a:off x="2583228" y="3520293"/>
             <a:ext cx="1562608" cy="349250"/>
           </a:xfrm>
           <a:prstGeom prst="rect">
@@ -16292,7 +16292,7 @@
         </p:nvSpPr>
         <p:spPr>
           <a:xfrm>
-            <a:off x="3027216" y="4318998"/>
+            <a:off x="3035856" y="4296007"/>
             <a:ext cx="657352" cy="349250"/>
           </a:xfrm>
           <a:prstGeom prst="rect">
@@ -16331,7 +16331,7 @@
         </p:nvSpPr>
         <p:spPr>
           <a:xfrm>
-            <a:off x="3082145" y="2677432"/>
+            <a:off x="3087452" y="2754068"/>
             <a:ext cx="657352" cy="349250"/>
           </a:xfrm>
           <a:prstGeom prst="rect">
@@ -16370,7 +16370,7 @@
         </p:nvSpPr>
         <p:spPr>
           <a:xfrm>
-            <a:off x="3082145" y="5202918"/>
+            <a:off x="3087452" y="5126282"/>
             <a:ext cx="657352" cy="349250"/>
           </a:xfrm>
           <a:prstGeom prst="rect">
